--- a/examples/revisao-de-kpis-de-area.pptx
+++ b/examples/revisao-de-kpis-de-area.pptx
@@ -5679,7 +5679,7 @@
       </p:sp>
       <p:graphicFrame>
         <p:nvGraphicFramePr>
-          <p:cNvPr id="12" name="Chart 11"/>
+          <p:cNvPr id="12" name="Chart 11" descr="O benefício potencial supera o investimento, mas ainda precisa ser realizado"/>
           <p:cNvGraphicFramePr>
             <a:graphicFrameLocks noGrp="1"/>
           </p:cNvGraphicFramePr>
